--- a/artifacts/speaking-portfolio-expanded/decks/free-tier-40min-screen.pptx
+++ b/artifacts/speaking-portfolio-expanded/decks/free-tier-40min-screen.pptx
@@ -611,7 +611,7 @@
                 <a:ea typeface="Arial"/>
                 <a:cs typeface="Arial"/>
               </a:rPr>
-              <a:t xml:space="preserve">Your acceptance rate is a price multiplier</a:t>
+              <a:t xml:space="preserve">Doubling on a Tuesday</a:t>
             </a:r>
             <a:endParaRPr lang="en-US" sz="1200"/>
           </a:p>
@@ -1092,7 +1092,7 @@
                 <a:ea typeface="Arial"/>
                 <a:cs typeface="Arial"/>
               </a:rPr>
-              <a:t xml:space="preserve">Demo: change one assumption, watch the unit cost</a:t>
+              <a:t xml:space="preserve">Turn the dial</a:t>
             </a:r>
             <a:endParaRPr lang="en-US" sz="1200"/>
           </a:p>
@@ -1230,7 +1230,7 @@
                 <a:ea typeface="Arial"/>
                 <a:cs typeface="Arial"/>
               </a:rPr>
-              <a:t xml:space="preserve">&gt; Sensitivity, not prediction. Quality is held fixed, which is itself an assumption.</a:t>
+              <a:t xml:space="preserve">&gt; Sensitivity, not prediction.</a:t>
             </a:r>
             <a:endParaRPr lang="en-US" sz="1200"/>
           </a:p>
@@ -2033,7 +2033,7 @@
                 <a:ea typeface="Arial"/>
                 <a:cs typeface="Arial"/>
               </a:rPr>
-              <a:t xml:space="preserve">So stop thinking of this as shopping, where the customer holds the power because they can leave. You are contracting, with a much better capitalized counterparty, and your architecture is the collateral. That reframe is the whole talk, and everything on the next three slides is just a way of reducing specificity or pricing the exposure.</a:t>
+              <a:t xml:space="preserve">So stop thinking of this as shopping, where the customer holds the power because they can leave. You are contracting, with a much better capitalized counterparty, and your architecture is the collateral. That reframe is the whole talk, and everything after this is just a way of reducing specificity or pricing the exposure.</a:t>
             </a:r>
             <a:endParaRPr lang="en-US" sz="1200"/>
           </a:p>
@@ -2146,7 +2146,7 @@
                 <a:ea typeface="Arial"/>
                 <a:cs typeface="Arial"/>
               </a:rPr>
-              <a:t xml:space="preserve">Reversibility has a price and you can compute it</a:t>
+              <a:t xml:space="preserve">Reversible is a line item</a:t>
             </a:r>
             <a:endParaRPr lang="en-US" sz="1200"/>
           </a:p>
@@ -2468,7 +2468,7 @@
                 <a:ea typeface="Arial"/>
                 <a:cs typeface="Arial"/>
               </a:rPr>
-              <a:t xml:space="preserve">Same for optimization. Take a cache or a router that halves inference per attempt at the same acceptance rate. In our fixture it saves one cent per attempt at one-times pricing and ten cents at ten-times. Divide your build cost by that, divide by monthly attempts, and you have payback in months. At a million attempts a month, ten cents each is a hundred thousand dollars a month and you should have started yesterday. At a thousand attempts a month it is ten dollars and you should never do it. Identical project. The sweep is what tells you which world you are living in. And preserved acceptance is an assumption until an eval says otherwise; a router that costs more to run than it saves is not better engineering.</a:t>
+              <a:t xml:space="preserve">Same for optimization. Take a cache or a router that halves inference per attempt at the same acceptance rate. In our fixture it saves one cent per attempt at one-times pricing and ten cents at ten-times. Divide your build cost by that, divide by monthly attempts, and you have payback in months. At a million attempts a month, ten cents each is a hundred thousand dollars a month and you should have started yesterday. At a thousand attempts a month it is a hundred dollars, ten at today's price, and you should never do it. Identical project. The sweep is what tells you which world you are living in. A router that costs more to run than it saves is not better engineering.</a:t>
             </a:r>
             <a:endParaRPr lang="en-US" sz="1200"/>
           </a:p>
@@ -3430,7 +3430,7 @@
                 <a:ea typeface="Arial"/>
                 <a:cs typeface="Arial"/>
               </a:rPr>
-              <a:t xml:space="preserve">Cheap intelligence changes incentives before it changes organizations. Leave the table up.</a:t>
+              <a:t xml:space="preserve">Cheap intelligence changes incentives before it changes organizations.</a:t>
             </a:r>
             <a:endParaRPr lang="en-US" sz="1200"/>
           </a:p>
@@ -3476,7 +3476,7 @@
                 <a:ea typeface="Arial"/>
                 <a:cs typeface="Arial"/>
               </a:rPr>
-              <a:t xml:space="preserve">Stage direction: Say the last line slowly. Leave the sweep table on screen for questions.</a:t>
+              <a:t xml:space="preserve">Stage direction: Say the last line slowly, then stop talking. For questions, jump back to the sweep table if this route kept slide 11.</a:t>
             </a:r>
             <a:endParaRPr lang="en-US" sz="1200"/>
           </a:p>
@@ -3566,7 +3566,7 @@
                 <a:ea typeface="Arial"/>
                 <a:cs typeface="Arial"/>
               </a:rPr>
-              <a:t xml:space="preserve">Price, cost, and value are three different numbers</a:t>
+              <a:t xml:space="preserve">Four boxes, one invoice</a:t>
             </a:r>
             <a:endParaRPr lang="en-US" sz="1200"/>
           </a:p>
@@ -4482,7 +4482,7 @@
                 <a:ea typeface="Arial"/>
                 <a:cs typeface="Arial"/>
               </a:rPr>
-              <a:t xml:space="preserve">Those enormous commitments are moves, not measurements</a:t>
+              <a:t xml:space="preserve">Burn the boats</a:t>
             </a:r>
             <a:endParaRPr lang="en-US" sz="1200"/>
           </a:p>
@@ -4758,7 +4758,7 @@
                 <a:ea typeface="Arial"/>
                 <a:cs typeface="Arial"/>
               </a:rPr>
-              <a:t xml:space="preserve">Which tells you something about the game underneath. Two well-funded players racing to acquire the same customers, both burning capital, neither able to stop first, is a war of attrition. In that model the price stays low for as long as both sides can pay to keep it there. Note who is not a player in that game. You are not a combatant. You are the terrain.</a:t>
+              <a:t xml:space="preserve">Which tells you something about the game underneath. Two well-funded players racing to acquire the same customers, both burning capital, neither able to stop first, is a war of attrition. In that model the price stays low for as long as both sides can pay to keep it there. Note who is not a player in that game. Somebody is buying your free tier, and it is not you. You are not a combatant. You are the terrain.</a:t>
             </a:r>
             <a:endParaRPr lang="en-US" sz="1200"/>
           </a:p>
@@ -4896,7 +4896,7 @@
                 <a:ea typeface="Arial"/>
                 <a:cs typeface="Arial"/>
               </a:rPr>
-              <a:t xml:space="preserve">Stage direction: Recheck all three items the week of the talk. If a number has moved, the frame still works; say the new number.</a:t>
+              <a:t xml:space="preserve">Stage direction: Recheck all three items the week of the talk. If a number has moved, the frame still works; say the new number. Specifically: Anthropic's IPO prospectus is expected late September 2026 and may disclose contract detail behind the $100B AWS commitment, so that figure or its framing can move. Do not confuse it with the adjacent Microsoft/OpenAI restructuring figures.</a:t>
             </a:r>
             <a:endParaRPr lang="en-US" sz="1200"/>
           </a:p>
@@ -7600,7 +7600,7 @@
                 <a:ea typeface="Arial"/>
                 <a:cs typeface="Arial"/>
               </a:rPr>
-              <a:t xml:space="preserve">Cry Me a Free Tier · Dan Levy</a:t>
+              <a:t xml:space="preserve">Buy Me a Free Tier · Dan Levy</a:t>
             </a:r>
             <a:endParaRPr lang="en-US" sz="1350"/>
           </a:p>
@@ -7917,7 +7917,7 @@
                 <a:ea typeface="Arial"/>
                 <a:cs typeface="Arial"/>
               </a:rPr>
-              <a:t xml:space="preserve">Cry Me a Free Tier</a:t>
+              <a:t xml:space="preserve">Buy Me a Free Tier</a:t>
             </a:r>
             <a:endParaRPr lang="en-US" sz="975"/>
           </a:p>
@@ -8097,7 +8097,7 @@
                 <a:ea typeface="Arial"/>
                 <a:cs typeface="Arial"/>
               </a:rPr>
-              <a:t xml:space="preserve">Your acceptance rate is a price multiplier</a:t>
+              <a:t xml:space="preserve">Doubling on a Tuesday</a:t>
             </a:r>
             <a:endParaRPr lang="en-US" sz="3900"/>
           </a:p>
@@ -8509,7 +8509,7 @@
                 <a:ea typeface="Arial"/>
                 <a:cs typeface="Arial"/>
               </a:rPr>
-              <a:t xml:space="preserve">Cry Me a Free Tier</a:t>
+              <a:t xml:space="preserve">Buy Me a Free Tier</a:t>
             </a:r>
             <a:endParaRPr lang="en-US" sz="975"/>
           </a:p>
@@ -8689,30 +8689,7 @@
                 <a:ea typeface="Arial"/>
                 <a:cs typeface="Arial"/>
               </a:rPr>
-              <a:t xml:space="preserve">Demo: change one assumption, watch the unit</a:t>
-            </a:r>
-            <a:endParaRPr lang="en-US" sz="3900"/>
-          </a:p>
-          <a:p>
-            <a:pPr marL="0" indent="0">
-              <a:lnSpc>
-                <a:spcPts val="4680"/>
-              </a:lnSpc>
-              <a:spcAft>
-                <a:spcPts val="0"/>
-              </a:spcAft>
-              <a:buNone/>
-            </a:pPr>
-            <a:r>
-              <a:rPr lang="en-US" sz="3900" b="1">
-                <a:solidFill>
-                  <a:srgbClr val="F5F1E9"/>
-                </a:solidFill>
-                <a:latin typeface="Arial"/>
-                <a:ea typeface="Arial"/>
-                <a:cs typeface="Arial"/>
-              </a:rPr>
-              <a:t xml:space="preserve">cost</a:t>
+              <a:t xml:space="preserve">Turn the dial</a:t>
             </a:r>
             <a:endParaRPr lang="en-US" sz="3900"/>
           </a:p>
@@ -9349,7 +9326,7 @@
                 <a:ea typeface="Arial"/>
                 <a:cs typeface="Arial"/>
               </a:rPr>
-              <a:t xml:space="preserve">Sensitivity, not prediction. Quality is held fixed, which is itself an assumption.</a:t>
+              <a:t xml:space="preserve">Sensitivity, not prediction.</a:t>
             </a:r>
             <a:endParaRPr lang="en-US" sz="2025"/>
           </a:p>
@@ -9421,7 +9398,7 @@
                 <a:ea typeface="Arial"/>
                 <a:cs typeface="Arial"/>
               </a:rPr>
-              <a:t xml:space="preserve">Cry Me a Free Tier</a:t>
+              <a:t xml:space="preserve">Buy Me a Free Tier</a:t>
             </a:r>
             <a:endParaRPr lang="en-US" sz="975"/>
           </a:p>
@@ -9990,7 +9967,7 @@
                 <a:ea typeface="Arial"/>
                 <a:cs typeface="Arial"/>
               </a:rPr>
-              <a:t xml:space="preserve">Cry Me a Free Tier</a:t>
+              <a:t xml:space="preserve">Buy Me a Free Tier</a:t>
             </a:r>
             <a:endParaRPr lang="en-US" sz="975"/>
           </a:p>
@@ -10170,30 +10147,7 @@
                 <a:ea typeface="Arial"/>
                 <a:cs typeface="Arial"/>
               </a:rPr>
-              <a:t xml:space="preserve">Reversibility has a price and you can compute</a:t>
-            </a:r>
-            <a:endParaRPr lang="en-US" sz="3900"/>
-          </a:p>
-          <a:p>
-            <a:pPr marL="0" indent="0">
-              <a:lnSpc>
-                <a:spcPts val="4680"/>
-              </a:lnSpc>
-              <a:spcAft>
-                <a:spcPts val="0"/>
-              </a:spcAft>
-              <a:buNone/>
-            </a:pPr>
-            <a:r>
-              <a:rPr lang="en-US" sz="3900" b="1">
-                <a:solidFill>
-                  <a:srgbClr val="F5F1E9"/>
-                </a:solidFill>
-                <a:latin typeface="Arial"/>
-                <a:ea typeface="Arial"/>
-                <a:cs typeface="Arial"/>
-              </a:rPr>
-              <a:t xml:space="preserve">it</a:t>
+              <a:t xml:space="preserve">Reversible is a line item</a:t>
             </a:r>
             <a:endParaRPr lang="en-US" sz="3900"/>
           </a:p>
@@ -10582,7 +10536,7 @@
                 <a:ea typeface="Arial"/>
                 <a:cs typeface="Arial"/>
               </a:rPr>
-              <a:t xml:space="preserve">Cry Me a Free Tier</a:t>
+              <a:t xml:space="preserve">Buy Me a Free Tier</a:t>
             </a:r>
             <a:endParaRPr lang="en-US" sz="975"/>
           </a:p>
@@ -11151,7 +11105,7 @@
                 <a:ea typeface="Arial"/>
                 <a:cs typeface="Arial"/>
               </a:rPr>
-              <a:t xml:space="preserve">Cry Me a Free Tier</a:t>
+              <a:t xml:space="preserve">Buy Me a Free Tier</a:t>
             </a:r>
             <a:endParaRPr lang="en-US" sz="975"/>
           </a:p>
@@ -11720,7 +11674,7 @@
                 <a:ea typeface="Arial"/>
                 <a:cs typeface="Arial"/>
               </a:rPr>
-              <a:t xml:space="preserve">Cry Me a Free Tier</a:t>
+              <a:t xml:space="preserve">Buy Me a Free Tier</a:t>
             </a:r>
             <a:endParaRPr lang="en-US" sz="975"/>
           </a:p>
@@ -11900,30 +11854,7 @@
                 <a:ea typeface="Arial"/>
                 <a:cs typeface="Arial"/>
               </a:rPr>
-              <a:t xml:space="preserve">Price, cost, and value are three different</a:t>
-            </a:r>
-            <a:endParaRPr lang="en-US" sz="3900"/>
-          </a:p>
-          <a:p>
-            <a:pPr marL="0" indent="0">
-              <a:lnSpc>
-                <a:spcPts val="4680"/>
-              </a:lnSpc>
-              <a:spcAft>
-                <a:spcPts val="0"/>
-              </a:spcAft>
-              <a:buNone/>
-            </a:pPr>
-            <a:r>
-              <a:rPr lang="en-US" sz="3900" b="1">
-                <a:solidFill>
-                  <a:srgbClr val="F5F1E9"/>
-                </a:solidFill>
-                <a:latin typeface="Arial"/>
-                <a:ea typeface="Arial"/>
-                <a:cs typeface="Arial"/>
-              </a:rPr>
-              <a:t xml:space="preserve">numbers</a:t>
+              <a:t xml:space="preserve">Four boxes, one invoice</a:t>
             </a:r>
             <a:endParaRPr lang="en-US" sz="3900"/>
           </a:p>
@@ -12214,7 +12145,7 @@
                 <a:ea typeface="Arial"/>
                 <a:cs typeface="Arial"/>
               </a:rPr>
-              <a:t xml:space="preserve">Cry Me a Free Tier</a:t>
+              <a:t xml:space="preserve">Buy Me a Free Tier</a:t>
             </a:r>
             <a:endParaRPr lang="en-US" sz="975"/>
           </a:p>
@@ -12685,7 +12616,7 @@
                 <a:ea typeface="Arial"/>
                 <a:cs typeface="Arial"/>
               </a:rPr>
-              <a:t xml:space="preserve">Cry Me a Free Tier</a:t>
+              <a:t xml:space="preserve">Buy Me a Free Tier</a:t>
             </a:r>
             <a:endParaRPr lang="en-US" sz="975"/>
           </a:p>
@@ -12865,30 +12796,7 @@
                 <a:ea typeface="Arial"/>
                 <a:cs typeface="Arial"/>
               </a:rPr>
-              <a:t xml:space="preserve">Those enormous commitments are moves, not</a:t>
-            </a:r>
-            <a:endParaRPr lang="en-US" sz="3900"/>
-          </a:p>
-          <a:p>
-            <a:pPr marL="0" indent="0">
-              <a:lnSpc>
-                <a:spcPts val="4680"/>
-              </a:lnSpc>
-              <a:spcAft>
-                <a:spcPts val="0"/>
-              </a:spcAft>
-              <a:buNone/>
-            </a:pPr>
-            <a:r>
-              <a:rPr lang="en-US" sz="3900" b="1">
-                <a:solidFill>
-                  <a:srgbClr val="F5F1E9"/>
-                </a:solidFill>
-                <a:latin typeface="Arial"/>
-                <a:ea typeface="Arial"/>
-                <a:cs typeface="Arial"/>
-              </a:rPr>
-              <a:t xml:space="preserve">measurements</a:t>
+              <a:t xml:space="preserve">Burn the boats</a:t>
             </a:r>
             <a:endParaRPr lang="en-US" sz="3900"/>
           </a:p>
@@ -13300,7 +13208,7 @@
                 <a:ea typeface="Arial"/>
                 <a:cs typeface="Arial"/>
               </a:rPr>
-              <a:t xml:space="preserve">Cry Me a Free Tier</a:t>
+              <a:t xml:space="preserve">Buy Me a Free Tier</a:t>
             </a:r>
             <a:endParaRPr lang="en-US" sz="975"/>
           </a:p>
@@ -13823,7 +13731,7 @@
                 <a:ea typeface="Arial"/>
                 <a:cs typeface="Arial"/>
               </a:rPr>
-              <a:t xml:space="preserve">Cry Me a Free Tier</a:t>
+              <a:t xml:space="preserve">Buy Me a Free Tier</a:t>
             </a:r>
             <a:endParaRPr lang="en-US" sz="975"/>
           </a:p>
@@ -14369,7 +14277,7 @@
                 <a:ea typeface="Arial"/>
                 <a:cs typeface="Arial"/>
               </a:rPr>
-              <a:t xml:space="preserve">Cry Me a Free Tier</a:t>
+              <a:t xml:space="preserve">Buy Me a Free Tier</a:t>
             </a:r>
             <a:endParaRPr lang="en-US" sz="975"/>
           </a:p>
@@ -15013,7 +14921,7 @@
                 <a:ea typeface="Arial"/>
                 <a:cs typeface="Arial"/>
               </a:rPr>
-              <a:t xml:space="preserve">Cry Me a Free Tier</a:t>
+              <a:t xml:space="preserve">Buy Me a Free Tier</a:t>
             </a:r>
             <a:endParaRPr lang="en-US" sz="975"/>
           </a:p>
@@ -15582,7 +15490,7 @@
                 <a:ea typeface="Arial"/>
                 <a:cs typeface="Arial"/>
               </a:rPr>
-              <a:t xml:space="preserve">Cry Me a Free Tier</a:t>
+              <a:t xml:space="preserve">Buy Me a Free Tier</a:t>
             </a:r>
             <a:endParaRPr lang="en-US" sz="975"/>
           </a:p>
@@ -16128,7 +16036,7 @@
                 <a:ea typeface="Arial"/>
                 <a:cs typeface="Arial"/>
               </a:rPr>
-              <a:t xml:space="preserve">Cry Me a Free Tier</a:t>
+              <a:t xml:space="preserve">Buy Me a Free Tier</a:t>
             </a:r>
             <a:endParaRPr lang="en-US" sz="975"/>
           </a:p>

--- a/artifacts/speaking-portfolio-expanded/decks/free-tier-40min-screen.pptx
+++ b/artifacts/speaking-portfolio-expanded/decks/free-tier-40min-screen.pptx
@@ -153,7 +153,7 @@
                 <a:ea typeface="Arial"/>
                 <a:cs typeface="Arial"/>
               </a:rPr>
-              <a:t xml:space="preserve">00:00 to 02:30 · warm</a:t>
+              <a:t xml:space="preserve">00:00 to 02:15 · warm</a:t>
             </a:r>
             <a:endParaRPr lang="en-US" sz="1200"/>
           </a:p>
@@ -657,7 +657,7 @@
                 <a:ea typeface="Arial"/>
                 <a:cs typeface="Arial"/>
               </a:rPr>
-              <a:t xml:space="preserve">22:00 to 25:00 · steady</a:t>
+              <a:t xml:space="preserve">22:15 to 24:45 · steady</a:t>
             </a:r>
             <a:endParaRPr lang="en-US" sz="1200"/>
           </a:p>
@@ -1138,7 +1138,7 @@
                 <a:ea typeface="Arial"/>
                 <a:cs typeface="Arial"/>
               </a:rPr>
-              <a:t xml:space="preserve">25:00 to 29:00 · peak</a:t>
+              <a:t xml:space="preserve">24:45 to 28:45 · peak</a:t>
             </a:r>
             <a:endParaRPr lang="en-US" sz="1200"/>
           </a:p>
@@ -1711,7 +1711,7 @@
                 <a:ea typeface="Arial"/>
                 <a:cs typeface="Arial"/>
               </a:rPr>
-              <a:t xml:space="preserve">29:00 to 32:00 · peak</a:t>
+              <a:t xml:space="preserve">28:45 to 32:00 · peak</a:t>
             </a:r>
             <a:endParaRPr lang="en-US" sz="1200"/>
           </a:p>
@@ -2376,7 +2376,7 @@
                 <a:ea typeface="Arial"/>
                 <a:cs typeface="Arial"/>
               </a:rPr>
-              <a:t xml:space="preserve">Everyone in this field says "keep it reversible" like it is a personality trait. It is not. It is an option, in the financial sense, and Dixit and Pindyck wrote the book on valuing exactly this kind of flexibility under uncertainty. The right to switch providers has a value that rises with how uncertain the price is and how exposed you are. It also has a premium you pay every month: the abstraction tax, a second eval suite, rehearsal time, and a generic wrapper that hides real differences between models and occasionally makes everything worse.</a:t>
+              <a:t xml:space="preserve">Everyone says "keep it reversible" like it is a personality trait. It is not, it is an option in the financial sense, and Dixit and Pindyck wrote the book on valuing flexibility under uncertainty. The right to switch providers gains value as the price gets less certain and your exposure grows. It also has a monthly premium: the abstraction tax, a second eval suite, rehearsal time, and a generic wrapper that hides real differences between models.</a:t>
             </a:r>
             <a:endParaRPr lang="en-US" sz="1200"/>
           </a:p>
@@ -2422,7 +2422,7 @@
                 <a:ea typeface="Arial"/>
                 <a:cs typeface="Arial"/>
               </a:rPr>
-              <a:t xml:space="preserve">So do not argue about portability on vibes. Price it. Your exposure is the three prices on the next slide times your volume. Your premium is the engineering you would spend. Compare the two numbers.</a:t>
+              <a:t xml:space="preserve">So do not argue about portability on vibes. Price it. Exposure is the three prices on the next slide times your volume; the premium is the engineering you would spend. Compare the two numbers.</a:t>
             </a:r>
             <a:endParaRPr lang="en-US" sz="1200"/>
           </a:p>
@@ -2468,7 +2468,7 @@
                 <a:ea typeface="Arial"/>
                 <a:cs typeface="Arial"/>
               </a:rPr>
-              <a:t xml:space="preserve">Same for optimization. Take a cache or a router that halves inference per attempt at the same acceptance rate. In our fixture it saves one cent per attempt at one-times pricing and ten cents at ten-times. Divide your build cost by that, divide by monthly attempts, and you have payback in months. At a million attempts a month, ten cents each is a hundred thousand dollars a month and you should have started yesterday. At a thousand attempts a month it is a hundred dollars, ten at today's price, and you should never do it. Identical project. The sweep is what tells you which world you are living in. A router that costs more to run than it saves is not better engineering.</a:t>
+              <a:t xml:space="preserve">Same for optimization. Take a router that halves inference per attempt at the same acceptance rate: in our fixture it saves a cent per attempt at sticker price and ten cents at ten times. At a million attempts a month, ten cents each is a hundred thousand dollars and you should have started yesterday. At a thousand attempts it is a hundred dollars — ten at today's price — and you should never do it. Identical project. The sweep tells you which world you live in, and a router that costs more to run than it saves is not better engineering.</a:t>
             </a:r>
             <a:endParaRPr lang="en-US" sz="1200"/>
           </a:p>
@@ -2673,7 +2673,7 @@
                 <a:ea typeface="Arial"/>
                 <a:cs typeface="Arial"/>
               </a:rPr>
-              <a:t xml:space="preserve">35:00 to 38:00 · land</a:t>
+              <a:t xml:space="preserve">35:00 to 37:15 · land</a:t>
             </a:r>
             <a:endParaRPr lang="en-US" sz="1200"/>
           </a:p>
@@ -3108,7 +3108,7 @@
                 <a:ea typeface="Arial"/>
                 <a:cs typeface="Arial"/>
               </a:rPr>
-              <a:t xml:space="preserve">38:00 to 40:00 · land</a:t>
+              <a:t xml:space="preserve">37:15 to 40:00 · land</a:t>
             </a:r>
             <a:endParaRPr lang="en-US" sz="1200"/>
           </a:p>
@@ -3612,7 +3612,7 @@
                 <a:ea typeface="Arial"/>
                 <a:cs typeface="Arial"/>
               </a:rPr>
-              <a:t xml:space="preserve">02:30 to 04:30 · warm</a:t>
+              <a:t xml:space="preserve">02:15 to 04:00 · warm</a:t>
             </a:r>
             <a:endParaRPr lang="en-US" sz="1200"/>
           </a:p>
@@ -4070,7 +4070,7 @@
                 <a:ea typeface="Arial"/>
                 <a:cs typeface="Arial"/>
               </a:rPr>
-              <a:t xml:space="preserve">04:30 to 07:30 · steady</a:t>
+              <a:t xml:space="preserve">04:00 to 06:45 · steady</a:t>
             </a:r>
             <a:endParaRPr lang="en-US" sz="1200"/>
           </a:p>
@@ -4528,7 +4528,7 @@
                 <a:ea typeface="Arial"/>
                 <a:cs typeface="Arial"/>
               </a:rPr>
-              <a:t xml:space="preserve">07:30 to 10:00 · build</a:t>
+              <a:t xml:space="preserve">06:45 to 09:30 · build</a:t>
             </a:r>
             <a:endParaRPr lang="en-US" sz="1200"/>
           </a:p>
@@ -4712,7 +4712,7 @@
                 <a:ea typeface="Arial"/>
                 <a:cs typeface="Arial"/>
               </a:rPr>
-              <a:t xml:space="preserve">Everyone reads these as evidence about cost. They are not. They are evidence about strategy, and Thomas Schelling gave us the word in 1960: a credible commitment. You deliberately destroy your own ability to back out, precisely so everyone else updates. Burn the boats. A ten-year contract you cannot walk away from is not a disclosure of your margins. It is a signal that you intend to still be here, aimed at competitors and at customers who are nervous about picking you.</a:t>
+              <a:t xml:space="preserve">Everyone reads these as evidence about cost. They are evidence about strategy, and Thomas Schelling gave us the word in 1960: a credible commitment. You deliberately destroy your own ability to back out, precisely so everyone else updates. Burn the boats. A ten-year contract you cannot walk away from discloses nothing about your margins. It signals that you intend to still be here, aimed at competitors and at nervous customers.</a:t>
             </a:r>
             <a:endParaRPr lang="en-US" sz="1200"/>
           </a:p>
@@ -5055,7 +5055,7 @@
                 <a:ea typeface="Arial"/>
                 <a:cs typeface="Arial"/>
               </a:rPr>
-              <a:t xml:space="preserve">10:00 to 12:30 · build</a:t>
+              <a:t xml:space="preserve">09:30 to 11:45 · build</a:t>
             </a:r>
             <a:endParaRPr lang="en-US" sz="1200"/>
           </a:p>
@@ -5536,7 +5536,7 @@
                 <a:ea typeface="Arial"/>
                 <a:cs typeface="Arial"/>
               </a:rPr>
-              <a:t xml:space="preserve">12:30 to 15:00 · build</a:t>
+              <a:t xml:space="preserve">11:45 to 15:00 · build</a:t>
             </a:r>
             <a:endParaRPr lang="en-US" sz="1200"/>
           </a:p>
@@ -5812,7 +5812,7 @@
                 <a:ea typeface="Arial"/>
                 <a:cs typeface="Arial"/>
               </a:rPr>
-              <a:t xml:space="preserve">So: your per-token price has fallen off a cliff over the last few years, and your bill went up. Everyone in this room has had that conversation with a CFO and lost it. You are not being gouged and you did not do anything wrong. Spend is price times consumption, and consumption is jobs times calls per job times tokens per call. Cheapness moved every term on the right. Epoch's data through 2025 shows the price of a fixed capability falling fast and very unevenly by task, which is real and worth knowing, and is also exactly the condition under which total spend rises.</a:t>
+              <a:t xml:space="preserve">So: your per-token price fell off a cliff and your bill went up. Everyone here has had that conversation with a CFO and lost it. You are not being gouged and you did nothing wrong. Spend is price times jobs times calls per job times tokens per call, and cheapness moved every term on the right. Epoch's data through 2025 shows the price of a fixed capability falling fast and very unevenly by task — which is real, and is also exactly the condition under which total spend rises.</a:t>
             </a:r>
             <a:endParaRPr lang="en-US" sz="1200"/>
           </a:p>
@@ -6109,7 +6109,7 @@
                 <a:ea typeface="Arial"/>
                 <a:cs typeface="Arial"/>
               </a:rPr>
-              <a:t xml:space="preserve">15:00 to 18:00 · build</a:t>
+              <a:t xml:space="preserve">15:00 to 17:00 · build</a:t>
             </a:r>
             <a:endParaRPr lang="en-US" sz="1200"/>
           </a:p>
@@ -6613,7 +6613,7 @@
                 <a:ea typeface="Arial"/>
                 <a:cs typeface="Arial"/>
               </a:rPr>
-              <a:t xml:space="preserve">18:00 to 20:00 · steady</a:t>
+              <a:t xml:space="preserve">17:00 to 19:45 · steady</a:t>
             </a:r>
             <a:endParaRPr lang="en-US" sz="1200"/>
           </a:p>
@@ -6843,7 +6843,7 @@
                 <a:ea typeface="Arial"/>
                 <a:cs typeface="Arial"/>
               </a:rPr>
-              <a:t xml:space="preserve">That is path dependence, word four: where you can get to depends on how you got here, and reversal costs more than the original decision did. Paul David made the argument famous with QWERTY in 1985, and I want to be straight with you, because it matters for how you use this: economists have been fighting about that example ever since. Liebowitz and Margolis published a paper in 1990 called The Fable of the Keys arguing the evidence was thin. The concept survives. The canonical example is contested.</a:t>
+              <a:t xml:space="preserve">That is path dependence, word four: where you can get to depends on how you got here, and reversal costs more than the original decision did. Paul David made it famous with QWERTY in 1985, and I will be straight with you because it matters for how you use this — economists have fought about that example ever since, and Liebowitz and Margolis argued in 1990 that the evidence was thin. The concept survives. The canonical example is contested.</a:t>
             </a:r>
             <a:endParaRPr lang="en-US" sz="1200"/>
           </a:p>
@@ -7094,7 +7094,7 @@
                 <a:ea typeface="Arial"/>
                 <a:cs typeface="Arial"/>
               </a:rPr>
-              <a:t xml:space="preserve">20:00 to 22:00 · steady</a:t>
+              <a:t xml:space="preserve">19:45 to 22:15 · steady</a:t>
             </a:r>
             <a:endParaRPr lang="en-US" sz="1200"/>
           </a:p>
@@ -7324,7 +7324,7 @@
                 <a:ea typeface="Arial"/>
                 <a:cs typeface="Arial"/>
               </a:rPr>
-              <a:t xml:space="preserve">And notice what Shoup actually recommended, because everyone gets this wrong. He never said ban parking. He said charge the right price for it, and give the money back to the neighborhood. Same here. The fix is not austerity and it is not a policy forbidding the model. It is putting the number in front of the person making the choice, at the moment they make it. Estimated cost per accepted outcome, in the design doc, next to the latency budget.</a:t>
+              <a:t xml:space="preserve">And notice what Shoup actually recommended, because everyone gets this wrong. He never said ban parking. He said charge the right price and give the money back to the neighborhood. Same here. The fix is not austerity or a policy forbidding the model. It is putting the number in front of the person choosing, at the moment they choose: estimated cost per accepted outcome, in the design doc, next to the latency budget.</a:t>
             </a:r>
             <a:endParaRPr lang="en-US" sz="1200"/>
           </a:p>
